--- a/assets/powerpoints/module-consultation/E2-je-retiens-des-mots.pptx
+++ b/assets/powerpoints/module-consultation/E2-je-retiens-des-mots.pptx
@@ -4432,7 +4432,7 @@
             <a:r>
               <a:rPr sz="1300" b="1" i="0" spc="156">
                 <a:solidFill>
-                  <a:srgbClr val="166534"/>
+                  <a:srgbClr val="A5335F"/>
                 </a:solidFill>
                 <a:latin typeface="Verdana"/>
               </a:rPr>
@@ -4772,7 +4772,7 @@
             <a:r>
               <a:rPr sz="1300" b="1" i="0" spc="156">
                 <a:solidFill>
-                  <a:srgbClr val="166534"/>
+                  <a:srgbClr val="A5335F"/>
                 </a:solidFill>
                 <a:latin typeface="Verdana"/>
               </a:rPr>
@@ -4922,7 +4922,7 @@
             </a:avLst>
           </a:prstGeom>
           <a:solidFill>
-            <a:srgbClr val="E3F1E7"/>
+            <a:srgbClr val="FCE9F0"/>
           </a:solidFill>
           <a:ln>
             <a:noFill/>
@@ -4979,7 +4979,7 @@
             <a:r>
               <a:rPr sz="1500" b="1" i="0">
                 <a:solidFill>
-                  <a:srgbClr val="166534"/>
+                  <a:srgbClr val="A5335F"/>
                 </a:solidFill>
                 <a:latin typeface="Verdana"/>
               </a:rPr>
@@ -5099,7 +5099,7 @@
             </a:avLst>
           </a:prstGeom>
           <a:solidFill>
-            <a:srgbClr val="E3F1E7"/>
+            <a:srgbClr val="FCE9F0"/>
           </a:solidFill>
           <a:ln>
             <a:noFill/>
@@ -5156,7 +5156,7 @@
             <a:r>
               <a:rPr sz="1500" b="1" i="0">
                 <a:solidFill>
-                  <a:srgbClr val="166534"/>
+                  <a:srgbClr val="A5335F"/>
                 </a:solidFill>
                 <a:latin typeface="Verdana"/>
               </a:rPr>
@@ -5276,7 +5276,7 @@
             </a:avLst>
           </a:prstGeom>
           <a:solidFill>
-            <a:srgbClr val="E3F1E7"/>
+            <a:srgbClr val="FCE9F0"/>
           </a:solidFill>
           <a:ln>
             <a:noFill/>
@@ -5333,7 +5333,7 @@
             <a:r>
               <a:rPr sz="1500" b="1" i="0">
                 <a:solidFill>
-                  <a:srgbClr val="166534"/>
+                  <a:srgbClr val="A5335F"/>
                 </a:solidFill>
                 <a:latin typeface="Verdana"/>
               </a:rPr>
@@ -5453,7 +5453,7 @@
             </a:avLst>
           </a:prstGeom>
           <a:solidFill>
-            <a:srgbClr val="E3F1E7"/>
+            <a:srgbClr val="FCE9F0"/>
           </a:solidFill>
           <a:ln>
             <a:noFill/>
@@ -5510,7 +5510,7 @@
             <a:r>
               <a:rPr sz="1500" b="1" i="0">
                 <a:solidFill>
-                  <a:srgbClr val="166534"/>
+                  <a:srgbClr val="A5335F"/>
                 </a:solidFill>
                 <a:latin typeface="Verdana"/>
               </a:rPr>
@@ -5630,7 +5630,7 @@
             </a:avLst>
           </a:prstGeom>
           <a:solidFill>
-            <a:srgbClr val="E3F1E7"/>
+            <a:srgbClr val="FCE9F0"/>
           </a:solidFill>
           <a:ln>
             <a:noFill/>
@@ -5687,7 +5687,7 @@
             <a:r>
               <a:rPr sz="1500" b="1" i="0">
                 <a:solidFill>
-                  <a:srgbClr val="166534"/>
+                  <a:srgbClr val="A5335F"/>
                 </a:solidFill>
                 <a:latin typeface="Verdana"/>
               </a:rPr>
@@ -5807,7 +5807,7 @@
             </a:avLst>
           </a:prstGeom>
           <a:solidFill>
-            <a:srgbClr val="E3F1E7"/>
+            <a:srgbClr val="FCE9F0"/>
           </a:solidFill>
           <a:ln>
             <a:noFill/>
@@ -5864,7 +5864,7 @@
             <a:r>
               <a:rPr sz="1500" b="1" i="0">
                 <a:solidFill>
-                  <a:srgbClr val="166534"/>
+                  <a:srgbClr val="A5335F"/>
                 </a:solidFill>
                 <a:latin typeface="Verdana"/>
               </a:rPr>
@@ -6089,7 +6089,7 @@
             <a:r>
               <a:rPr sz="1300" b="1" i="0" spc="156">
                 <a:solidFill>
-                  <a:srgbClr val="166534"/>
+                  <a:srgbClr val="A5335F"/>
                 </a:solidFill>
                 <a:latin typeface="Verdana"/>
               </a:rPr>
@@ -6239,7 +6239,7 @@
             </a:avLst>
           </a:prstGeom>
           <a:solidFill>
-            <a:srgbClr val="E3F1E7"/>
+            <a:srgbClr val="FCE9F0"/>
           </a:solidFill>
           <a:ln>
             <a:noFill/>
@@ -6296,7 +6296,7 @@
             <a:r>
               <a:rPr sz="1500" b="1" i="0">
                 <a:solidFill>
-                  <a:srgbClr val="166534"/>
+                  <a:srgbClr val="A5335F"/>
                 </a:solidFill>
                 <a:latin typeface="Verdana"/>
               </a:rPr>
@@ -6407,7 +6407,7 @@
             </a:avLst>
           </a:prstGeom>
           <a:solidFill>
-            <a:srgbClr val="E3F1E7"/>
+            <a:srgbClr val="FCE9F0"/>
           </a:solidFill>
           <a:ln>
             <a:noFill/>
@@ -6464,7 +6464,7 @@
             <a:r>
               <a:rPr sz="1500" b="1" i="0">
                 <a:solidFill>
-                  <a:srgbClr val="166534"/>
+                  <a:srgbClr val="A5335F"/>
                 </a:solidFill>
                 <a:latin typeface="Verdana"/>
               </a:rPr>
@@ -6575,7 +6575,7 @@
             </a:avLst>
           </a:prstGeom>
           <a:solidFill>
-            <a:srgbClr val="E3F1E7"/>
+            <a:srgbClr val="FCE9F0"/>
           </a:solidFill>
           <a:ln>
             <a:noFill/>
@@ -6632,7 +6632,7 @@
             <a:r>
               <a:rPr sz="1500" b="1" i="0">
                 <a:solidFill>
-                  <a:srgbClr val="166534"/>
+                  <a:srgbClr val="A5335F"/>
                 </a:solidFill>
                 <a:latin typeface="Verdana"/>
               </a:rPr>
@@ -6743,7 +6743,7 @@
             </a:avLst>
           </a:prstGeom>
           <a:solidFill>
-            <a:srgbClr val="E3F1E7"/>
+            <a:srgbClr val="FCE9F0"/>
           </a:solidFill>
           <a:ln>
             <a:noFill/>
@@ -6800,7 +6800,7 @@
             <a:r>
               <a:rPr sz="1500" b="1" i="0">
                 <a:solidFill>
-                  <a:srgbClr val="166534"/>
+                  <a:srgbClr val="A5335F"/>
                 </a:solidFill>
                 <a:latin typeface="Verdana"/>
               </a:rPr>
@@ -6911,7 +6911,7 @@
             </a:avLst>
           </a:prstGeom>
           <a:solidFill>
-            <a:srgbClr val="E3F1E7"/>
+            <a:srgbClr val="FCE9F0"/>
           </a:solidFill>
           <a:ln>
             <a:noFill/>
@@ -6968,7 +6968,7 @@
             <a:r>
               <a:rPr sz="1500" b="1" i="0">
                 <a:solidFill>
-                  <a:srgbClr val="166534"/>
+                  <a:srgbClr val="A5335F"/>
                 </a:solidFill>
                 <a:latin typeface="Verdana"/>
               </a:rPr>
@@ -7079,7 +7079,7 @@
             </a:avLst>
           </a:prstGeom>
           <a:solidFill>
-            <a:srgbClr val="E3F1E7"/>
+            <a:srgbClr val="FCE9F0"/>
           </a:solidFill>
           <a:ln>
             <a:noFill/>
@@ -7136,7 +7136,7 @@
             <a:r>
               <a:rPr sz="1500" b="1" i="0">
                 <a:solidFill>
-                  <a:srgbClr val="166534"/>
+                  <a:srgbClr val="A5335F"/>
                 </a:solidFill>
                 <a:latin typeface="Verdana"/>
               </a:rPr>
@@ -7352,7 +7352,7 @@
             <a:r>
               <a:rPr sz="1300" b="1" i="0" spc="156">
                 <a:solidFill>
-                  <a:srgbClr val="166534"/>
+                  <a:srgbClr val="A5335F"/>
                 </a:solidFill>
                 <a:latin typeface="Verdana"/>
               </a:rPr>
@@ -7502,7 +7502,7 @@
             </a:avLst>
           </a:prstGeom>
           <a:solidFill>
-            <a:srgbClr val="E3F1E7"/>
+            <a:srgbClr val="FCE9F0"/>
           </a:solidFill>
           <a:ln>
             <a:noFill/>
@@ -7559,7 +7559,7 @@
             <a:r>
               <a:rPr sz="1500" b="1" i="0">
                 <a:solidFill>
-                  <a:srgbClr val="166534"/>
+                  <a:srgbClr val="A5335F"/>
                 </a:solidFill>
                 <a:latin typeface="Verdana"/>
               </a:rPr>
@@ -7679,7 +7679,7 @@
             </a:avLst>
           </a:prstGeom>
           <a:solidFill>
-            <a:srgbClr val="E3F1E7"/>
+            <a:srgbClr val="FCE9F0"/>
           </a:solidFill>
           <a:ln>
             <a:noFill/>
@@ -7736,7 +7736,7 @@
             <a:r>
               <a:rPr sz="1500" b="1" i="0">
                 <a:solidFill>
-                  <a:srgbClr val="166534"/>
+                  <a:srgbClr val="A5335F"/>
                 </a:solidFill>
                 <a:latin typeface="Verdana"/>
               </a:rPr>
@@ -7856,7 +7856,7 @@
             </a:avLst>
           </a:prstGeom>
           <a:solidFill>
-            <a:srgbClr val="E3F1E7"/>
+            <a:srgbClr val="FCE9F0"/>
           </a:solidFill>
           <a:ln>
             <a:noFill/>
@@ -7913,7 +7913,7 @@
             <a:r>
               <a:rPr sz="1500" b="1" i="0">
                 <a:solidFill>
-                  <a:srgbClr val="166534"/>
+                  <a:srgbClr val="A5335F"/>
                 </a:solidFill>
                 <a:latin typeface="Verdana"/>
               </a:rPr>
@@ -8033,7 +8033,7 @@
             </a:avLst>
           </a:prstGeom>
           <a:solidFill>
-            <a:srgbClr val="E3F1E7"/>
+            <a:srgbClr val="FCE9F0"/>
           </a:solidFill>
           <a:ln>
             <a:noFill/>
@@ -8090,7 +8090,7 @@
             <a:r>
               <a:rPr sz="1500" b="1" i="0">
                 <a:solidFill>
-                  <a:srgbClr val="166534"/>
+                  <a:srgbClr val="A5335F"/>
                 </a:solidFill>
                 <a:latin typeface="Verdana"/>
               </a:rPr>
@@ -8210,7 +8210,7 @@
             </a:avLst>
           </a:prstGeom>
           <a:solidFill>
-            <a:srgbClr val="E3F1E7"/>
+            <a:srgbClr val="FCE9F0"/>
           </a:solidFill>
           <a:ln>
             <a:noFill/>
@@ -8267,7 +8267,7 @@
             <a:r>
               <a:rPr sz="1500" b="1" i="0">
                 <a:solidFill>
-                  <a:srgbClr val="166534"/>
+                  <a:srgbClr val="A5335F"/>
                 </a:solidFill>
                 <a:latin typeface="Verdana"/>
               </a:rPr>
@@ -8387,7 +8387,7 @@
             </a:avLst>
           </a:prstGeom>
           <a:solidFill>
-            <a:srgbClr val="E3F1E7"/>
+            <a:srgbClr val="FCE9F0"/>
           </a:solidFill>
           <a:ln>
             <a:noFill/>
@@ -8444,7 +8444,7 @@
             <a:r>
               <a:rPr sz="1500" b="1" i="0">
                 <a:solidFill>
-                  <a:srgbClr val="166534"/>
+                  <a:srgbClr val="A5335F"/>
                 </a:solidFill>
                 <a:latin typeface="Verdana"/>
               </a:rPr>
@@ -9132,7 +9132,7 @@
             <a:r>
               <a:rPr sz="1300" b="1" i="0" spc="156">
                 <a:solidFill>
-                  <a:srgbClr val="166534"/>
+                  <a:srgbClr val="A5335F"/>
                 </a:solidFill>
                 <a:latin typeface="Verdana"/>
               </a:rPr>
@@ -9243,7 +9243,7 @@
             </a:avLst>
           </a:prstGeom>
           <a:solidFill>
-            <a:srgbClr val="E3F1E7"/>
+            <a:srgbClr val="FCE9F0"/>
           </a:solidFill>
           <a:ln>
             <a:noFill/>
@@ -9300,7 +9300,7 @@
             <a:r>
               <a:rPr sz="1500" b="1" i="0">
                 <a:solidFill>
-                  <a:srgbClr val="166534"/>
+                  <a:srgbClr val="A5335F"/>
                 </a:solidFill>
                 <a:latin typeface="Verdana"/>
               </a:rPr>
@@ -9411,7 +9411,7 @@
             </a:avLst>
           </a:prstGeom>
           <a:solidFill>
-            <a:srgbClr val="E3F1E7"/>
+            <a:srgbClr val="FCE9F0"/>
           </a:solidFill>
           <a:ln>
             <a:noFill/>
@@ -9468,7 +9468,7 @@
             <a:r>
               <a:rPr sz="1500" b="1" i="0">
                 <a:solidFill>
-                  <a:srgbClr val="166534"/>
+                  <a:srgbClr val="A5335F"/>
                 </a:solidFill>
                 <a:latin typeface="Verdana"/>
               </a:rPr>
@@ -9579,7 +9579,7 @@
             </a:avLst>
           </a:prstGeom>
           <a:solidFill>
-            <a:srgbClr val="E3F1E7"/>
+            <a:srgbClr val="FCE9F0"/>
           </a:solidFill>
           <a:ln>
             <a:noFill/>
@@ -9636,7 +9636,7 @@
             <a:r>
               <a:rPr sz="1500" b="1" i="0">
                 <a:solidFill>
-                  <a:srgbClr val="166534"/>
+                  <a:srgbClr val="A5335F"/>
                 </a:solidFill>
                 <a:latin typeface="Verdana"/>
               </a:rPr>
@@ -9747,7 +9747,7 @@
             </a:avLst>
           </a:prstGeom>
           <a:solidFill>
-            <a:srgbClr val="E3F1E7"/>
+            <a:srgbClr val="FCE9F0"/>
           </a:solidFill>
           <a:ln>
             <a:noFill/>
@@ -9804,7 +9804,7 @@
             <a:r>
               <a:rPr sz="1500" b="1" i="0">
                 <a:solidFill>
-                  <a:srgbClr val="166534"/>
+                  <a:srgbClr val="A5335F"/>
                 </a:solidFill>
                 <a:latin typeface="Verdana"/>
               </a:rPr>
@@ -10020,7 +10020,7 @@
             <a:r>
               <a:rPr sz="1300" b="1" i="0" spc="156">
                 <a:solidFill>
-                  <a:srgbClr val="166534"/>
+                  <a:srgbClr val="A5335F"/>
                 </a:solidFill>
                 <a:latin typeface="Verdana"/>
               </a:rPr>
@@ -10960,7 +10960,7 @@
             <a:r>
               <a:rPr sz="1300" b="1" i="0" spc="156">
                 <a:solidFill>
-                  <a:srgbClr val="166534"/>
+                  <a:srgbClr val="A5335F"/>
                 </a:solidFill>
                 <a:latin typeface="Verdana"/>
               </a:rPr>
@@ -11780,7 +11780,7 @@
             <a:r>
               <a:rPr sz="1300" b="1" i="0" spc="156">
                 <a:solidFill>
-                  <a:srgbClr val="166534"/>
+                  <a:srgbClr val="A5335F"/>
                 </a:solidFill>
                 <a:latin typeface="Verdana"/>
               </a:rPr>
@@ -12600,7 +12600,7 @@
             <a:r>
               <a:rPr sz="1300" b="1" i="0" spc="156">
                 <a:solidFill>
-                  <a:srgbClr val="166534"/>
+                  <a:srgbClr val="A5335F"/>
                 </a:solidFill>
                 <a:latin typeface="Verdana"/>
               </a:rPr>
@@ -12841,7 +12841,7 @@
             <a:r>
               <a:rPr sz="1600" b="1" i="0">
                 <a:solidFill>
-                  <a:srgbClr val="166534"/>
+                  <a:srgbClr val="A5335F"/>
                 </a:solidFill>
                 <a:latin typeface="Verdana"/>
               </a:rPr>
@@ -13000,7 +13000,7 @@
             <a:r>
               <a:rPr sz="1600" b="1" i="0">
                 <a:solidFill>
-                  <a:srgbClr val="166534"/>
+                  <a:srgbClr val="A5335F"/>
                 </a:solidFill>
                 <a:latin typeface="Verdana"/>
               </a:rPr>
@@ -13159,7 +13159,7 @@
             <a:r>
               <a:rPr sz="1600" b="1" i="0">
                 <a:solidFill>
-                  <a:srgbClr val="166534"/>
+                  <a:srgbClr val="A5335F"/>
                 </a:solidFill>
                 <a:latin typeface="Verdana"/>
               </a:rPr>
@@ -13318,7 +13318,7 @@
             <a:r>
               <a:rPr sz="1600" b="1" i="0">
                 <a:solidFill>
-                  <a:srgbClr val="166534"/>
+                  <a:srgbClr val="A5335F"/>
                 </a:solidFill>
                 <a:latin typeface="Verdana"/>
               </a:rPr>
@@ -13477,7 +13477,7 @@
             <a:r>
               <a:rPr sz="1600" b="1" i="0">
                 <a:solidFill>
-                  <a:srgbClr val="166534"/>
+                  <a:srgbClr val="A5335F"/>
                 </a:solidFill>
                 <a:latin typeface="Verdana"/>
               </a:rPr>
@@ -13732,7 +13732,7 @@
             <a:r>
               <a:rPr sz="1300" b="1" i="0" spc="156">
                 <a:solidFill>
-                  <a:srgbClr val="166534"/>
+                  <a:srgbClr val="A5335F"/>
                 </a:solidFill>
                 <a:latin typeface="Verdana"/>
               </a:rPr>
@@ -13973,7 +13973,7 @@
             <a:r>
               <a:rPr sz="1400" b="1" i="0">
                 <a:solidFill>
-                  <a:srgbClr val="166534"/>
+                  <a:srgbClr val="A5335F"/>
                 </a:solidFill>
                 <a:latin typeface="Verdana"/>
               </a:rPr>
@@ -14132,7 +14132,7 @@
             <a:r>
               <a:rPr sz="1400" b="1" i="0">
                 <a:solidFill>
-                  <a:srgbClr val="166534"/>
+                  <a:srgbClr val="A5335F"/>
                 </a:solidFill>
                 <a:latin typeface="Verdana"/>
               </a:rPr>
@@ -14291,7 +14291,7 @@
             <a:r>
               <a:rPr sz="1400" b="1" i="0">
                 <a:solidFill>
-                  <a:srgbClr val="166534"/>
+                  <a:srgbClr val="A5335F"/>
                 </a:solidFill>
                 <a:latin typeface="Verdana"/>
               </a:rPr>
@@ -14450,7 +14450,7 @@
             <a:r>
               <a:rPr sz="1400" b="1" i="0">
                 <a:solidFill>
-                  <a:srgbClr val="166534"/>
+                  <a:srgbClr val="A5335F"/>
                 </a:solidFill>
                 <a:latin typeface="Verdana"/>
               </a:rPr>
@@ -14790,7 +14790,7 @@
             <a:r>
               <a:rPr sz="1300" b="1" i="0" spc="156">
                 <a:solidFill>
-                  <a:srgbClr val="166534"/>
+                  <a:srgbClr val="A5335F"/>
                 </a:solidFill>
                 <a:latin typeface="Verdana"/>
               </a:rPr>
@@ -14914,7 +14914,7 @@
             <a:r>
               <a:rPr sz="2400" b="1" i="0">
                 <a:solidFill>
-                  <a:srgbClr val="166534"/>
+                  <a:srgbClr val="A5335F"/>
                 </a:solidFill>
                 <a:latin typeface="Verdana"/>
               </a:rPr>
@@ -15038,7 +15038,7 @@
             <a:r>
               <a:rPr sz="2400" b="1" i="0">
                 <a:solidFill>
-                  <a:srgbClr val="166534"/>
+                  <a:srgbClr val="A5335F"/>
                 </a:solidFill>
                 <a:latin typeface="Verdana"/>
               </a:rPr>
@@ -15162,7 +15162,7 @@
             <a:r>
               <a:rPr sz="2400" b="1" i="0">
                 <a:solidFill>
-                  <a:srgbClr val="166534"/>
+                  <a:srgbClr val="A5335F"/>
                 </a:solidFill>
                 <a:latin typeface="Verdana"/>
               </a:rPr>
@@ -15286,7 +15286,7 @@
             <a:r>
               <a:rPr sz="2400" b="1" i="0">
                 <a:solidFill>
-                  <a:srgbClr val="166534"/>
+                  <a:srgbClr val="A5335F"/>
                 </a:solidFill>
                 <a:latin typeface="Verdana"/>
               </a:rPr>
@@ -15502,7 +15502,7 @@
             <a:r>
               <a:rPr sz="1300" b="1" i="0" spc="156">
                 <a:solidFill>
-                  <a:srgbClr val="166534"/>
+                  <a:srgbClr val="A5335F"/>
                 </a:solidFill>
                 <a:latin typeface="Verdana"/>
               </a:rPr>
@@ -15652,7 +15652,7 @@
             </a:avLst>
           </a:prstGeom>
           <a:solidFill>
-            <a:srgbClr val="E3F1E7"/>
+            <a:srgbClr val="FCE9F0"/>
           </a:solidFill>
           <a:ln>
             <a:noFill/>
@@ -15709,7 +15709,7 @@
             <a:r>
               <a:rPr sz="1500" b="1" i="0">
                 <a:solidFill>
-                  <a:srgbClr val="166534"/>
+                  <a:srgbClr val="A5335F"/>
                 </a:solidFill>
                 <a:latin typeface="Verdana"/>
               </a:rPr>
@@ -15820,7 +15820,7 @@
             </a:avLst>
           </a:prstGeom>
           <a:solidFill>
-            <a:srgbClr val="E3F1E7"/>
+            <a:srgbClr val="FCE9F0"/>
           </a:solidFill>
           <a:ln>
             <a:noFill/>
@@ -15877,7 +15877,7 @@
             <a:r>
               <a:rPr sz="1500" b="1" i="0">
                 <a:solidFill>
-                  <a:srgbClr val="166534"/>
+                  <a:srgbClr val="A5335F"/>
                 </a:solidFill>
                 <a:latin typeface="Verdana"/>
               </a:rPr>
@@ -15988,7 +15988,7 @@
             </a:avLst>
           </a:prstGeom>
           <a:solidFill>
-            <a:srgbClr val="E3F1E7"/>
+            <a:srgbClr val="FCE9F0"/>
           </a:solidFill>
           <a:ln>
             <a:noFill/>
@@ -16045,7 +16045,7 @@
             <a:r>
               <a:rPr sz="1500" b="1" i="0">
                 <a:solidFill>
-                  <a:srgbClr val="166534"/>
+                  <a:srgbClr val="A5335F"/>
                 </a:solidFill>
                 <a:latin typeface="Verdana"/>
               </a:rPr>
@@ -16156,7 +16156,7 @@
             </a:avLst>
           </a:prstGeom>
           <a:solidFill>
-            <a:srgbClr val="E3F1E7"/>
+            <a:srgbClr val="FCE9F0"/>
           </a:solidFill>
           <a:ln>
             <a:noFill/>
@@ -16213,7 +16213,7 @@
             <a:r>
               <a:rPr sz="1500" b="1" i="0">
                 <a:solidFill>
-                  <a:srgbClr val="166534"/>
+                  <a:srgbClr val="A5335F"/>
                 </a:solidFill>
                 <a:latin typeface="Verdana"/>
               </a:rPr>
@@ -16324,7 +16324,7 @@
             </a:avLst>
           </a:prstGeom>
           <a:solidFill>
-            <a:srgbClr val="E3F1E7"/>
+            <a:srgbClr val="FCE9F0"/>
           </a:solidFill>
           <a:ln>
             <a:noFill/>
@@ -16381,7 +16381,7 @@
             <a:r>
               <a:rPr sz="1500" b="1" i="0">
                 <a:solidFill>
-                  <a:srgbClr val="166534"/>
+                  <a:srgbClr val="A5335F"/>
                 </a:solidFill>
                 <a:latin typeface="Verdana"/>
               </a:rPr>
@@ -16492,7 +16492,7 @@
             </a:avLst>
           </a:prstGeom>
           <a:solidFill>
-            <a:srgbClr val="E3F1E7"/>
+            <a:srgbClr val="FCE9F0"/>
           </a:solidFill>
           <a:ln>
             <a:noFill/>
@@ -16549,7 +16549,7 @@
             <a:r>
               <a:rPr sz="1500" b="1" i="0">
                 <a:solidFill>
-                  <a:srgbClr val="166534"/>
+                  <a:srgbClr val="A5335F"/>
                 </a:solidFill>
                 <a:latin typeface="Verdana"/>
               </a:rPr>
